--- a/Schools_ML_Track/camp_2026/slides/DA/DA17.pptx
+++ b/Schools_ML_Track/camp_2026/slides/DA/DA17.pptx
@@ -129,7 +129,7 @@
   <p:extLst>
     <p:ext uri="{521415D9-36F7-43E2-AB2F-B90AF26B5E84}">
       <p14:sectionLst xmlns:p14="http://schemas.microsoft.com/office/powerpoint/2010/main">
-        <p14:section name="Opening" id="{0e406d44-5d5b-3972-45d6-3fb8a4b755bc}">
+        <p14:section name="Opening" id="{ff103a18-3d26-a3b8-0fc8-331c93aaf360}">
           <p14:sldIdLst>
             <p14:sldId id="256"/>
             <p14:sldId id="257"/>
@@ -140,7 +140,7 @@
             <p14:sldId id="262"/>
           </p14:sldIdLst>
         </p14:section>
-        <p14:section name="Block A" id="{98ccb5f0-ec89-3383-33ef-99710213812a}">
+        <p14:section name="Block A" id="{12700b99-64f4-b755-3ac0-c26d9a0c211d}">
           <p14:sldIdLst>
             <p14:sldId id="263"/>
             <p14:sldId id="264"/>
@@ -150,15 +150,15 @@
             <p14:sldId id="269"/>
           </p14:sldIdLst>
         </p14:section>
-        <p14:section name="Break" id="{748d3b84-5ea1-0f01-45b5-b9c393660de6}">
+        <p14:section name="Break" id="{16931091-e5e5-3ad2-9cd7-2716d084cda6}">
           <p14:sldIdLst>
             <p14:sldId id="267"/>
           </p14:sldIdLst>
         </p14:section>
-        <p14:section name="Block A" id="{ffcf2974-9ce8-f748-8a03-91b500e52e18}">
+        <p14:section name="Block A" id="{baf3fb8d-8158-fcaa-fd93-94a274e70207}">
           <p14:sldIdLst/>
         </p14:section>
-        <p14:section name="Block B" id="{0cb22bda-5707-a0bb-49c5-b0aa6eea04de}">
+        <p14:section name="Block B" id="{249ec244-ee91-bf7f-cd8b-dfdbc7ee4f75}">
           <p14:sldIdLst>
             <p14:sldId id="270"/>
             <p14:sldId id="271"/>
@@ -168,7 +168,7 @@
             <p14:sldId id="275"/>
           </p14:sldIdLst>
         </p14:section>
-        <p14:section name="Make and close" id="{34206288-3b49-f9b0-1834-b56c7de79eb2}">
+        <p14:section name="Make and close" id="{fed4c66f-0edd-29ab-ff79-0f4a37ba6d10}">
           <p14:sldIdLst>
             <p14:sldId id="276"/>
             <p14:sldId id="277"/>

--- a/Schools_ML_Track/camp_2026/slides/DA/DA17.pptx
+++ b/Schools_ML_Track/camp_2026/slides/DA/DA17.pptx
@@ -129,7 +129,7 @@
   <p:extLst>
     <p:ext uri="{521415D9-36F7-43E2-AB2F-B90AF26B5E84}">
       <p14:sectionLst xmlns:p14="http://schemas.microsoft.com/office/powerpoint/2010/main">
-        <p14:section name="Opening" id="{ff103a18-3d26-a3b8-0fc8-331c93aaf360}">
+        <p14:section name="Opening" id="{bfbcc843-9189-a0cc-8a36-eef7b41118c7}">
           <p14:sldIdLst>
             <p14:sldId id="256"/>
             <p14:sldId id="257"/>
@@ -140,7 +140,7 @@
             <p14:sldId id="262"/>
           </p14:sldIdLst>
         </p14:section>
-        <p14:section name="Block A" id="{12700b99-64f4-b755-3ac0-c26d9a0c211d}">
+        <p14:section name="Block A" id="{2f9ef636-0243-646c-2c5e-17f57862936a}">
           <p14:sldIdLst>
             <p14:sldId id="263"/>
             <p14:sldId id="264"/>
@@ -150,15 +150,15 @@
             <p14:sldId id="269"/>
           </p14:sldIdLst>
         </p14:section>
-        <p14:section name="Break" id="{16931091-e5e5-3ad2-9cd7-2716d084cda6}">
+        <p14:section name="Break" id="{04bfb4e2-d351-816c-c8f2-77828641b030}">
           <p14:sldIdLst>
             <p14:sldId id="267"/>
           </p14:sldIdLst>
         </p14:section>
-        <p14:section name="Block A" id="{baf3fb8d-8158-fcaa-fd93-94a274e70207}">
+        <p14:section name="Block A" id="{88197efc-34f8-3551-82a0-05ec4ae0cd0b}">
           <p14:sldIdLst/>
         </p14:section>
-        <p14:section name="Block B" id="{249ec244-ee91-bf7f-cd8b-dfdbc7ee4f75}">
+        <p14:section name="Block B" id="{1cf7db34-083a-21a8-3fb6-60d23c4389ea}">
           <p14:sldIdLst>
             <p14:sldId id="270"/>
             <p14:sldId id="271"/>
@@ -168,7 +168,7 @@
             <p14:sldId id="275"/>
           </p14:sldIdLst>
         </p14:section>
-        <p14:section name="Make and close" id="{fed4c66f-0edd-29ab-ff79-0f4a37ba6d10}">
+        <p14:section name="Make and close" id="{76f13b5f-d509-0dcf-d185-32ef1b6ccd44}">
           <p14:sldIdLst>
             <p14:sldId id="276"/>
             <p14:sldId id="277"/>
@@ -3288,7 +3288,24 @@
                 <a:ea typeface="Lato" pitchFamily="34" charset="-122"/>
                 <a:cs typeface="Lato" pitchFamily="34" charset="-120"/>
               </a:rPr>
-              <a:t>Merging two tables and the fan-out trap</a:t>
+              <a:t>Merging two tables</a:t>
+            </a:r>
+            <a:endParaRPr lang="en-US" sz="5600" dirty="0"/>
+          </a:p>
+          <a:p>
+            <a:pPr algn="l" indent="0" marL="0">
+              <a:buNone/>
+            </a:pPr>
+            <a:r>
+              <a:rPr lang="en-US" sz="5600" b="1" dirty="0">
+                <a:solidFill>
+                  <a:srgbClr val="FFFFFF"/>
+                </a:solidFill>
+                <a:latin typeface="Lato" pitchFamily="34" charset="0"/>
+                <a:ea typeface="Lato" pitchFamily="34" charset="-122"/>
+                <a:cs typeface="Lato" pitchFamily="34" charset="-120"/>
+              </a:rPr>
+              <a:t>and the fan-out trap</a:t>
             </a:r>
             <a:endParaRPr lang="en-US" sz="5600" dirty="0"/>
           </a:p>
@@ -6676,15 +6693,15 @@
           <a:p>
             <a:pPr algn="l" indent="0" marL="0">
               <a:lnSpc>
-                <a:spcPts val="3480"/>
+                <a:spcPts val="3240"/>
               </a:lnSpc>
               <a:spcAft>
-                <a:spcPts val="2520"/>
+                <a:spcPts val="2020"/>
               </a:spcAft>
               <a:buNone/>
             </a:pPr>
             <a:r>
-              <a:rPr lang="en-US" sz="2900" dirty="0">
+              <a:rPr lang="en-US" sz="2700" dirty="0">
                 <a:solidFill>
                   <a:srgbClr val="111111"/>
                 </a:solidFill>
@@ -6692,22 +6709,22 @@
                 <a:ea typeface="Lato" pitchFamily="34" charset="-122"/>
                 <a:cs typeface="Lato" pitchFamily="34" charset="-120"/>
               </a:rPr>
-              <a:t>Merge the sales with sunrise_branches.csv on branch_id to get the branch names. Check that the row count is unchanged. Total the revenue by branch name and reconcile it with the totals you found in session 9.</a:t>
-            </a:r>
-            <a:endParaRPr lang="en-US" sz="2900" dirty="0"/>
-          </a:p>
-          <a:p>
-            <a:pPr algn="l" indent="0" marL="0">
-              <a:lnSpc>
-                <a:spcPts val="3480"/>
+              <a:t>Merge the sales with sunrise_branches.csv on branch_id to get the branch names.</a:t>
+            </a:r>
+            <a:endParaRPr lang="en-US" sz="2700" dirty="0"/>
+          </a:p>
+          <a:p>
+            <a:pPr algn="l" indent="0" marL="0">
+              <a:lnSpc>
+                <a:spcPts val="3240"/>
               </a:lnSpc>
               <a:spcAft>
-                <a:spcPts val="2520"/>
+                <a:spcPts val="2020"/>
               </a:spcAft>
               <a:buNone/>
             </a:pPr>
             <a:r>
-              <a:rPr lang="en-US" sz="2900" dirty="0">
+              <a:rPr lang="en-US" sz="2700" dirty="0">
                 <a:solidFill>
                   <a:srgbClr val="111111"/>
                 </a:solidFill>
@@ -6715,9 +6732,55 @@
                 <a:ea typeface="Lato" pitchFamily="34" charset="-122"/>
                 <a:cs typeface="Lato" pitchFamily="34" charset="-120"/>
               </a:rPr>
+              <a:t>Check that the row count is unchanged.</a:t>
+            </a:r>
+            <a:endParaRPr lang="en-US" sz="2700" dirty="0"/>
+          </a:p>
+          <a:p>
+            <a:pPr algn="l" indent="0" marL="0">
+              <a:lnSpc>
+                <a:spcPts val="3240"/>
+              </a:lnSpc>
+              <a:spcAft>
+                <a:spcPts val="2020"/>
+              </a:spcAft>
+              <a:buNone/>
+            </a:pPr>
+            <a:r>
+              <a:rPr lang="en-US" sz="2700" dirty="0">
+                <a:solidFill>
+                  <a:srgbClr val="111111"/>
+                </a:solidFill>
+                <a:latin typeface="Lato" pitchFamily="34" charset="0"/>
+                <a:ea typeface="Lato" pitchFamily="34" charset="-122"/>
+                <a:cs typeface="Lato" pitchFamily="34" charset="-120"/>
+              </a:rPr>
+              <a:t>Total the revenue by branch name and reconcile it with the totals you found in session 9.</a:t>
+            </a:r>
+            <a:endParaRPr lang="en-US" sz="2700" dirty="0"/>
+          </a:p>
+          <a:p>
+            <a:pPr algn="l" indent="0" marL="0">
+              <a:lnSpc>
+                <a:spcPts val="3240"/>
+              </a:lnSpc>
+              <a:spcAft>
+                <a:spcPts val="2020"/>
+              </a:spcAft>
+              <a:buNone/>
+            </a:pPr>
+            <a:r>
+              <a:rPr lang="en-US" sz="2700" dirty="0">
+                <a:solidFill>
+                  <a:srgbClr val="111111"/>
+                </a:solidFill>
+                <a:latin typeface="Lato" pitchFamily="34" charset="0"/>
+                <a:ea typeface="Lato" pitchFamily="34" charset="-122"/>
+                <a:cs typeface="Lato" pitchFamily="34" charset="-120"/>
+              </a:rPr>
               <a:t>Save it as DA17. Write two sentences: what you changed and how you checked it.</a:t>
             </a:r>
-            <a:endParaRPr lang="en-US" sz="2900" dirty="0"/>
+            <a:endParaRPr lang="en-US" sz="2700" dirty="0"/>
           </a:p>
         </p:txBody>
       </p:sp>
